--- a/JavaScript/05 - Accessing DOM elements.pptx
+++ b/JavaScript/05 - Accessing DOM elements.pptx
@@ -249,7 +249,7 @@
             <a:fld id="{86D088FE-3E68-47FE-8BA4-634CD34BABBC}" type="datetimeFigureOut">
               <a:rPr lang="en-GB" smtClean="0"/>
               <a:pPr/>
-              <a:t>18/08/2025</a:t>
+              <a:t>16/06/2026</a:t>
             </a:fld>
             <a:endParaRPr lang="en-GB"/>
           </a:p>
@@ -421,7 +421,7 @@
             <a:fld id="{1D6B66C6-1E92-0F4E-A300-9D4ED1F0C23F}" type="datetimeFigureOut">
               <a:rPr lang="en-GB" smtClean="0"/>
               <a:pPr/>
-              <a:t>18/08/2025</a:t>
+              <a:t>16/06/2026</a:t>
             </a:fld>
             <a:endParaRPr lang="en-GB"/>
           </a:p>
@@ -2238,13 +2238,13 @@
           <p:nvPr userDrawn="1"/>
         </p:nvPicPr>
         <p:blipFill>
-          <a:blip r:embed="rId3">
+          <a:blip>
             <a:extLst>
               <a:ext uri="{28A0092B-C50C-407E-A947-70E740481C1C}">
                 <a14:useLocalDpi xmlns:a14="http://schemas.microsoft.com/office/drawing/2010/main" val="0"/>
               </a:ext>
               <a:ext uri="{96DAC541-7B7A-43D3-8B79-37D633B846F1}">
-                <asvg:svgBlip xmlns:asvg="http://schemas.microsoft.com/office/drawing/2016/SVG/main" r:embed="rId4"/>
+                <asvg:svgBlip xmlns:asvg="http://schemas.microsoft.com/office/drawing/2016/SVG/main" r:embed="rId3"/>
               </a:ext>
             </a:extLst>
           </a:blip>
@@ -10625,13 +10625,13 @@
           <p:nvPr userDrawn="1"/>
         </p:nvPicPr>
         <p:blipFill>
-          <a:blip r:embed="rId3">
+          <a:blip>
             <a:extLst>
               <a:ext uri="{28A0092B-C50C-407E-A947-70E740481C1C}">
                 <a14:useLocalDpi xmlns:a14="http://schemas.microsoft.com/office/drawing/2010/main" val="0"/>
               </a:ext>
               <a:ext uri="{96DAC541-7B7A-43D3-8B79-37D633B846F1}">
-                <asvg:svgBlip xmlns:asvg="http://schemas.microsoft.com/office/drawing/2016/SVG/main" r:embed="rId4"/>
+                <asvg:svgBlip xmlns:asvg="http://schemas.microsoft.com/office/drawing/2016/SVG/main" r:embed="rId3"/>
               </a:ext>
             </a:extLst>
           </a:blip>
@@ -17802,13 +17802,13 @@
           <p:nvPr userDrawn="1"/>
         </p:nvPicPr>
         <p:blipFill>
-          <a:blip r:embed="rId3">
+          <a:blip>
             <a:extLst>
               <a:ext uri="{28A0092B-C50C-407E-A947-70E740481C1C}">
                 <a14:useLocalDpi xmlns:a14="http://schemas.microsoft.com/office/drawing/2010/main" val="0"/>
               </a:ext>
               <a:ext uri="{96DAC541-7B7A-43D3-8B79-37D633B846F1}">
-                <asvg:svgBlip xmlns:asvg="http://schemas.microsoft.com/office/drawing/2016/SVG/main" r:embed="rId4"/>
+                <asvg:svgBlip xmlns:asvg="http://schemas.microsoft.com/office/drawing/2016/SVG/main" r:embed="rId3"/>
               </a:ext>
             </a:extLst>
           </a:blip>
@@ -20429,13 +20429,13 @@
           <p:nvPr userDrawn="1"/>
         </p:nvPicPr>
         <p:blipFill>
-          <a:blip r:embed="rId3">
+          <a:blip>
             <a:extLst>
               <a:ext uri="{28A0092B-C50C-407E-A947-70E740481C1C}">
                 <a14:useLocalDpi xmlns:a14="http://schemas.microsoft.com/office/drawing/2010/main" val="0"/>
               </a:ext>
               <a:ext uri="{96DAC541-7B7A-43D3-8B79-37D633B846F1}">
-                <asvg:svgBlip xmlns:asvg="http://schemas.microsoft.com/office/drawing/2016/SVG/main" r:embed="rId4"/>
+                <asvg:svgBlip xmlns:asvg="http://schemas.microsoft.com/office/drawing/2016/SVG/main" r:embed="rId3"/>
               </a:ext>
             </a:extLst>
           </a:blip>
@@ -21725,13 +21725,13 @@
           <p:nvPr userDrawn="1"/>
         </p:nvPicPr>
         <p:blipFill>
-          <a:blip r:embed="rId3">
+          <a:blip>
             <a:extLst>
               <a:ext uri="{28A0092B-C50C-407E-A947-70E740481C1C}">
                 <a14:useLocalDpi xmlns:a14="http://schemas.microsoft.com/office/drawing/2010/main" val="0"/>
               </a:ext>
               <a:ext uri="{96DAC541-7B7A-43D3-8B79-37D633B846F1}">
-                <asvg:svgBlip xmlns:asvg="http://schemas.microsoft.com/office/drawing/2016/SVG/main" r:embed="rId4"/>
+                <asvg:svgBlip xmlns:asvg="http://schemas.microsoft.com/office/drawing/2016/SVG/main" r:embed="rId3"/>
               </a:ext>
             </a:extLst>
           </a:blip>
@@ -33831,7 +33831,7 @@
                 </a:solidFill>
                 <a:latin typeface="Consolas" panose="020B0609020204030204" pitchFamily="49" charset="0"/>
               </a:rPr>
-              <a:t>greet</a:t>
+              <a:t>hello</a:t>
             </a:r>
             <a:r>
               <a:rPr lang="en-GB" b="1" dirty="0">
@@ -35122,6 +35122,23 @@
 </file>
 
 <file path=customXml/item1.xml><?xml version="1.0" encoding="utf-8"?>
+<p:properties xmlns:p="http://schemas.microsoft.com/office/2006/metadata/properties" xmlns:xsi="http://www.w3.org/2001/XMLSchema-instance" xmlns:pc="http://schemas.microsoft.com/office/infopath/2007/PartnerControls">
+  <documentManagement>
+    <BookTypeField0 xmlns="B42EA499-AA80-4ED5-9ED5-37A17D3EB549">
+      <Terms xmlns="http://schemas.microsoft.com/office/infopath/2007/PartnerControls">
+        <TermInfo xmlns="http://schemas.microsoft.com/office/infopath/2007/PartnerControls">
+          <TermName xmlns="http://schemas.microsoft.com/office/infopath/2007/PartnerControls">IK</TermName>
+          <TermId xmlns="http://schemas.microsoft.com/office/infopath/2007/PartnerControls">5abe6401-e87a-4499-80b4-3d21a1a6ebd7</TermId>
+        </TermInfo>
+      </Terms>
+    </BookTypeField0>
+    <IsBuildFile xmlns="B42EA499-AA80-4ED5-9ED5-37A17D3EB549" xsi:nil="true"/>
+    <SequenceNumber xmlns="B42EA499-AA80-4ED5-9ED5-37A17D3EB549" xsi:nil="true"/>
+  </documentManagement>
+</p:properties>
+</file>
+
+<file path=customXml/item2.xml><?xml version="1.0" encoding="utf-8"?>
 <ct:contentTypeSchema xmlns:ct="http://schemas.microsoft.com/office/2006/metadata/contentType" xmlns:ma="http://schemas.microsoft.com/office/2006/metadata/properties/metaAttributes" ct:_="" ma:_="" ma:contentTypeName="Courseware" ma:contentTypeID="0x010100F0967B7CEE8D417F966757887D9466FB005CB7CECC996A5B448C70C3215DE65491" ma:contentTypeVersion="0" ma:contentTypeDescription="Base content type which represents courseware documents" ma:contentTypeScope="" ma:versionID="633ed7bf8a9769dc10b8af609c2e65e8">
   <xsd:schema xmlns:xsd="http://www.w3.org/2001/XMLSchema" xmlns:xs="http://www.w3.org/2001/XMLSchema" xmlns:p="http://schemas.microsoft.com/office/2006/metadata/properties" xmlns:ns2="B42EA499-AA80-4ED5-9ED5-37A17D3EB549" targetNamespace="http://schemas.microsoft.com/office/2006/metadata/properties" ma:root="true" ma:fieldsID="6641bdc0935a9ffdc34b1682c1e0febc" ns2:_="">
     <xsd:import namespace="B42EA499-AA80-4ED5-9ED5-37A17D3EB549"/>
@@ -35261,23 +35278,6 @@
 </ct:contentTypeSchema>
 </file>
 
-<file path=customXml/item2.xml><?xml version="1.0" encoding="utf-8"?>
-<p:properties xmlns:p="http://schemas.microsoft.com/office/2006/metadata/properties" xmlns:xsi="http://www.w3.org/2001/XMLSchema-instance" xmlns:pc="http://schemas.microsoft.com/office/infopath/2007/PartnerControls">
-  <documentManagement>
-    <BookTypeField0 xmlns="B42EA499-AA80-4ED5-9ED5-37A17D3EB549">
-      <Terms xmlns="http://schemas.microsoft.com/office/infopath/2007/PartnerControls">
-        <TermInfo xmlns="http://schemas.microsoft.com/office/infopath/2007/PartnerControls">
-          <TermName xmlns="http://schemas.microsoft.com/office/infopath/2007/PartnerControls">IK</TermName>
-          <TermId xmlns="http://schemas.microsoft.com/office/infopath/2007/PartnerControls">5abe6401-e87a-4499-80b4-3d21a1a6ebd7</TermId>
-        </TermInfo>
-      </Terms>
-    </BookTypeField0>
-    <IsBuildFile xmlns="B42EA499-AA80-4ED5-9ED5-37A17D3EB549" xsi:nil="true"/>
-    <SequenceNumber xmlns="B42EA499-AA80-4ED5-9ED5-37A17D3EB549" xsi:nil="true"/>
-  </documentManagement>
-</p:properties>
-</file>
-
 <file path=customXml/item3.xml><?xml version="1.0" encoding="utf-8"?>
 <?mso-contentType ?>
 <FormTemplates xmlns="http://schemas.microsoft.com/sharepoint/v3/contenttype/forms">
@@ -35288,6 +35288,16 @@
 </file>
 
 <file path=customXml/itemProps1.xml><?xml version="1.0" encoding="utf-8"?>
+<ds:datastoreItem xmlns:ds="http://schemas.openxmlformats.org/officeDocument/2006/customXml" ds:itemID="{6276D8A5-6460-41D8-B2BB-D6C022FE8A5C}">
+  <ds:schemaRefs>
+    <ds:schemaRef ds:uri="http://schemas.microsoft.com/office/2006/metadata/properties"/>
+    <ds:schemaRef ds:uri="http://schemas.microsoft.com/office/infopath/2007/PartnerControls"/>
+    <ds:schemaRef ds:uri="B42EA499-AA80-4ED5-9ED5-37A17D3EB549"/>
+  </ds:schemaRefs>
+</ds:datastoreItem>
+</file>
+
+<file path=customXml/itemProps2.xml><?xml version="1.0" encoding="utf-8"?>
 <ds:datastoreItem xmlns:ds="http://schemas.openxmlformats.org/officeDocument/2006/customXml" ds:itemID="{96C7C959-319B-49E2-8C8F-A5D510E8AE2E}">
   <ds:schemaRefs>
     <ds:schemaRef ds:uri="http://schemas.microsoft.com/office/2006/metadata/contentType"/>
@@ -35305,16 +35315,6 @@
 </ds:datastoreItem>
 </file>
 
-<file path=customXml/itemProps2.xml><?xml version="1.0" encoding="utf-8"?>
-<ds:datastoreItem xmlns:ds="http://schemas.openxmlformats.org/officeDocument/2006/customXml" ds:itemID="{6276D8A5-6460-41D8-B2BB-D6C022FE8A5C}">
-  <ds:schemaRefs>
-    <ds:schemaRef ds:uri="http://schemas.microsoft.com/office/2006/metadata/properties"/>
-    <ds:schemaRef ds:uri="http://schemas.microsoft.com/office/infopath/2007/PartnerControls"/>
-    <ds:schemaRef ds:uri="B42EA499-AA80-4ED5-9ED5-37A17D3EB549"/>
-  </ds:schemaRefs>
-</ds:datastoreItem>
-</file>
-
 <file path=customXml/itemProps3.xml><?xml version="1.0" encoding="utf-8"?>
 <ds:datastoreItem xmlns:ds="http://schemas.openxmlformats.org/officeDocument/2006/customXml" ds:itemID="{D47B5C6E-C195-4668-928F-F519F583A6D4}">
   <ds:schemaRefs>
